--- a/SpaceONEZ_제안서.pptx
+++ b/SpaceONEZ_제안서.pptx
@@ -5612,7 +5612,7 @@
               </a:defRPr>
             </a:pPr>
             <a:r>
-              <a:t>위치  부산광역시 영도구 대평로 27번길 8</a:t>
+              <a:t>위치  부산광역시 영도구 봉래나루로 214 1층</a:t>
             </a:r>
           </a:p>
           <a:p>
